--- a/Lectures/Lecture5-ModelSelection.pptx
+++ b/Lectures/Lecture5-ModelSelection.pptx
@@ -6,7 +6,7 @@
     <p:sldMasterId id="2147483660" r:id="rId2"/>
   </p:sldMasterIdLst>
   <p:notesMasterIdLst>
-    <p:notesMasterId r:id="rId52"/>
+    <p:notesMasterId r:id="rId53"/>
   </p:notesMasterIdLst>
   <p:sldIdLst>
     <p:sldId id="256" r:id="rId3"/>
@@ -42,27 +42,28 @@
     <p:sldId id="483" r:id="rId33"/>
     <p:sldId id="489" r:id="rId34"/>
     <p:sldId id="487" r:id="rId35"/>
-    <p:sldId id="556" r:id="rId36"/>
-    <p:sldId id="488" r:id="rId37"/>
-    <p:sldId id="289" r:id="rId38"/>
-    <p:sldId id="290" r:id="rId39"/>
-    <p:sldId id="291" r:id="rId40"/>
-    <p:sldId id="292" r:id="rId41"/>
-    <p:sldId id="293" r:id="rId42"/>
-    <p:sldId id="469" r:id="rId43"/>
-    <p:sldId id="470" r:id="rId44"/>
-    <p:sldId id="296" r:id="rId45"/>
-    <p:sldId id="454" r:id="rId46"/>
-    <p:sldId id="550" r:id="rId47"/>
-    <p:sldId id="533" r:id="rId48"/>
-    <p:sldId id="543" r:id="rId49"/>
-    <p:sldId id="554" r:id="rId50"/>
-    <p:sldId id="531" r:id="rId51"/>
+    <p:sldId id="557" r:id="rId36"/>
+    <p:sldId id="556" r:id="rId37"/>
+    <p:sldId id="488" r:id="rId38"/>
+    <p:sldId id="289" r:id="rId39"/>
+    <p:sldId id="290" r:id="rId40"/>
+    <p:sldId id="291" r:id="rId41"/>
+    <p:sldId id="292" r:id="rId42"/>
+    <p:sldId id="293" r:id="rId43"/>
+    <p:sldId id="469" r:id="rId44"/>
+    <p:sldId id="470" r:id="rId45"/>
+    <p:sldId id="296" r:id="rId46"/>
+    <p:sldId id="454" r:id="rId47"/>
+    <p:sldId id="550" r:id="rId48"/>
+    <p:sldId id="533" r:id="rId49"/>
+    <p:sldId id="543" r:id="rId50"/>
+    <p:sldId id="554" r:id="rId51"/>
+    <p:sldId id="531" r:id="rId52"/>
   </p:sldIdLst>
   <p:sldSz cx="12192000" cy="6858000"/>
   <p:notesSz cx="6858000" cy="9144000"/>
   <p:custDataLst>
-    <p:tags r:id="rId53"/>
+    <p:tags r:id="rId54"/>
   </p:custDataLst>
   <p:defaultTextStyle>
     <a:defPPr marR="0" lvl="0" algn="l" rtl="0">
@@ -331,6 +332,7 @@
             <p14:sldId id="483"/>
             <p14:sldId id="489"/>
             <p14:sldId id="487"/>
+            <p14:sldId id="557"/>
           </p14:sldIdLst>
         </p14:section>
         <p14:section name="extra slides" id="{D89B9D84-8AED-794E-B826-66350CFCD900}">
@@ -24285,6 +24287,531 @@
 </file>
 
 <file path=ppt/slides/slide34.xml><?xml version="1.0" encoding="utf-8"?>
+<p:sld xmlns:a="http://schemas.openxmlformats.org/drawingml/2006/main" xmlns:r="http://schemas.openxmlformats.org/officeDocument/2006/relationships" xmlns:p="http://schemas.openxmlformats.org/presentationml/2006/main" showMasterSp="0">
+  <p:cSld>
+    <p:bg>
+      <p:bgPr>
+        <a:solidFill>
+          <a:srgbClr val="FFFFFF"/>
+        </a:solidFill>
+        <a:effectLst/>
+      </p:bgPr>
+    </p:bg>
+    <p:spTree>
+      <p:nvGrpSpPr>
+        <p:cNvPr id="1" name=""/>
+        <p:cNvGrpSpPr/>
+        <p:nvPr/>
+      </p:nvGrpSpPr>
+      <p:grpSpPr>
+        <a:xfrm>
+          <a:off x="0" y="0"/>
+          <a:ext cx="0" cy="0"/>
+          <a:chOff x="0" y="0"/>
+          <a:chExt cx="0" cy="0"/>
+        </a:xfrm>
+      </p:grpSpPr>
+      <p:sp>
+        <p:nvSpPr>
+          <p:cNvPr id="2" name="Rectangle 1">
+            <a:extLst>
+              <a:ext uri="{FF2B5EF4-FFF2-40B4-BE49-F238E27FC236}">
+                <a16:creationId xmlns:a16="http://schemas.microsoft.com/office/drawing/2014/main" id="{D144B930-4FEE-20EF-3726-D9053835C9BD}"/>
+              </a:ext>
+            </a:extLst>
+          </p:cNvPr>
+          <p:cNvSpPr/>
+          <p:nvPr>
+            <p:custDataLst>
+              <p:tags r:id="rId2"/>
+            </p:custDataLst>
+          </p:nvPr>
+        </p:nvSpPr>
+        <p:spPr>
+          <a:xfrm>
+            <a:off x="444693" y="1742703"/>
+            <a:ext cx="2371696" cy="2371696"/>
+          </a:xfrm>
+          <a:prstGeom prst="rect">
+            <a:avLst/>
+          </a:prstGeom>
+          <a:blipFill>
+            <a:blip r:embed="rId5">
+              <a:extLst>
+                <a:ext uri="{96DAC541-7B7A-43D3-8B79-37D633B846F1}">
+                  <asvg:svgBlip xmlns:asvg="http://schemas.microsoft.com/office/drawing/2016/SVG/main" r:embed="rId6"/>
+                </a:ext>
+              </a:extLst>
+            </a:blip>
+            <a:stretch>
+              <a:fillRect/>
+            </a:stretch>
+          </a:blipFill>
+          <a:ln>
+            <a:solidFill>
+              <a:srgbClr val="FFFFFF"/>
+            </a:solidFill>
+          </a:ln>
+        </p:spPr>
+        <p:style>
+          <a:lnRef idx="2">
+            <a:schemeClr val="accent1">
+              <a:shade val="15000"/>
+            </a:schemeClr>
+          </a:lnRef>
+          <a:fillRef idx="1">
+            <a:schemeClr val="accent1"/>
+          </a:fillRef>
+          <a:effectRef idx="0">
+            <a:schemeClr val="accent1"/>
+          </a:effectRef>
+          <a:fontRef idx="minor">
+            <a:schemeClr val="lt1"/>
+          </a:fontRef>
+        </p:style>
+        <p:txBody>
+          <a:bodyPr rtlCol="0" anchor="ctr"/>
+          <a:lstStyle/>
+          <a:p>
+            <a:pPr algn="ctr"/>
+            <a:endParaRPr lang="en-US"/>
+          </a:p>
+        </p:txBody>
+      </p:sp>
+      <p:sp>
+        <p:nvSpPr>
+          <p:cNvPr id="3" name="Rectangle 2">
+            <a:extLst>
+              <a:ext uri="{FF2B5EF4-FFF2-40B4-BE49-F238E27FC236}">
+                <a16:creationId xmlns:a16="http://schemas.microsoft.com/office/drawing/2014/main" id="{3D537AA0-9B56-E0B1-ECD5-CF11333DDF93}"/>
+              </a:ext>
+            </a:extLst>
+          </p:cNvPr>
+          <p:cNvSpPr/>
+          <p:nvPr>
+            <p:custDataLst>
+              <p:tags r:id="rId3"/>
+            </p:custDataLst>
+          </p:nvPr>
+        </p:nvSpPr>
+        <p:spPr>
+          <a:xfrm>
+            <a:off x="3112851" y="1000897"/>
+            <a:ext cx="8486226" cy="3855308"/>
+          </a:xfrm>
+          <a:prstGeom prst="rect">
+            <a:avLst/>
+          </a:prstGeom>
+          <a:noFill/>
+          <a:ln w="25400" cap="flat" cmpd="sng" algn="ctr">
+            <a:solidFill>
+              <a:srgbClr val="FFFFFF"/>
+            </a:solidFill>
+            <a:prstDash val="solid"/>
+          </a:ln>
+          <a:effectLst/>
+          <a:extLst>
+            <a:ext uri="{909E8E84-426E-40DD-AFC4-6F175D3DCCD1}">
+              <a14:hiddenFill xmlns:a14="http://schemas.microsoft.com/office/drawing/2010/main">
+                <a:solidFill>
+                  <a:schemeClr val="accent1"/>
+                </a:solidFill>
+              </a14:hiddenFill>
+            </a:ext>
+          </a:extLst>
+        </p:spPr>
+        <p:style>
+          <a:lnRef idx="2">
+            <a:schemeClr val="accent1">
+              <a:shade val="15000"/>
+            </a:schemeClr>
+          </a:lnRef>
+          <a:fillRef idx="1">
+            <a:schemeClr val="accent1"/>
+          </a:fillRef>
+          <a:effectRef idx="0">
+            <a:schemeClr val="accent1"/>
+          </a:effectRef>
+          <a:fontRef idx="minor">
+            <a:schemeClr val="lt1"/>
+          </a:fontRef>
+        </p:style>
+        <p:txBody>
+          <a:bodyPr rtlCol="0" anchor="ctr"/>
+          <a:lstStyle/>
+          <a:p>
+            <a:r>
+              <a:rPr lang="en-US" sz="4000" b="1">
+                <a:solidFill>
+                  <a:srgbClr val="000000"/>
+                </a:solidFill>
+              </a:rPr>
+              <a:t>what’s your experience with using git and GitHub?</a:t>
+            </a:r>
+          </a:p>
+        </p:txBody>
+      </p:sp>
+      <p:sp>
+        <p:nvSpPr>
+          <p:cNvPr id="4" name="Rectangle 3">
+            <a:extLst>
+              <a:ext uri="{FF2B5EF4-FFF2-40B4-BE49-F238E27FC236}">
+                <a16:creationId xmlns:a16="http://schemas.microsoft.com/office/drawing/2014/main" id="{25630FCC-55CC-024B-E375-EF807A6A104A}"/>
+              </a:ext>
+            </a:extLst>
+          </p:cNvPr>
+          <p:cNvSpPr/>
+          <p:nvPr/>
+        </p:nvSpPr>
+        <p:spPr>
+          <a:xfrm>
+            <a:off x="0" y="5820032"/>
+            <a:ext cx="12192001" cy="1037968"/>
+          </a:xfrm>
+          <a:prstGeom prst="rect">
+            <a:avLst/>
+          </a:prstGeom>
+          <a:solidFill>
+            <a:srgbClr val="198038"/>
+          </a:solidFill>
+          <a:ln w="25400" cap="flat" cmpd="sng" algn="ctr">
+            <a:noFill/>
+            <a:prstDash val="solid"/>
+          </a:ln>
+          <a:effectLst/>
+          <a:extLst>
+            <a:ext uri="{91240B29-F687-4F45-9708-019B960494DF}">
+              <a14:hiddenLine xmlns:a14="http://schemas.microsoft.com/office/drawing/2010/main" w="25400" cap="flat" cmpd="sng" algn="ctr">
+                <a:solidFill>
+                  <a:schemeClr val="accent1">
+                    <a:shade val="15000"/>
+                  </a:schemeClr>
+                </a:solidFill>
+                <a:prstDash val="solid"/>
+              </a14:hiddenLine>
+            </a:ext>
+          </a:extLst>
+        </p:spPr>
+        <p:style>
+          <a:lnRef idx="2">
+            <a:schemeClr val="accent1">
+              <a:shade val="15000"/>
+            </a:schemeClr>
+          </a:lnRef>
+          <a:fillRef idx="1">
+            <a:schemeClr val="accent1"/>
+          </a:fillRef>
+          <a:effectRef idx="0">
+            <a:schemeClr val="accent1"/>
+          </a:effectRef>
+          <a:fontRef idx="minor">
+            <a:schemeClr val="lt1"/>
+          </a:fontRef>
+        </p:style>
+        <p:txBody>
+          <a:bodyPr lIns="741155" tIns="259492" rIns="1852888" bIns="203886" rtlCol="0" anchor="ctr">
+            <a:normAutofit fontScale="85000" lnSpcReduction="10000"/>
+          </a:bodyPr>
+          <a:lstStyle/>
+          <a:p>
+            <a:r>
+              <a:rPr lang="en-US" sz="2600">
+                <a:solidFill>
+                  <a:srgbClr val="FFFFFF"/>
+                </a:solidFill>
+              </a:rPr>
+              <a:t>The </a:t>
+            </a:r>
+            <a:r>
+              <a:rPr lang="en-US" sz="2600">
+                <a:solidFill>
+                  <a:srgbClr val="FFFFFF"/>
+                </a:solidFill>
+                <a:hlinkClick r:id="rId7">
+                  <a:extLst>
+                    <a:ext uri="{A12FA001-AC4F-418D-AE19-62706E023703}">
+                      <ahyp:hlinkClr xmlns:ahyp="http://schemas.microsoft.com/office/drawing/2018/hyperlinkcolor" val="tx"/>
+                    </a:ext>
+                  </a:extLst>
+                </a:hlinkClick>
+              </a:rPr>
+              <a:t>Slido app</a:t>
+            </a:r>
+            <a:r>
+              <a:rPr lang="en-US" sz="2600">
+                <a:solidFill>
+                  <a:srgbClr val="FFFFFF"/>
+                </a:solidFill>
+              </a:rPr>
+              <a:t> must be installed on every computer you’re presenting from</a:t>
+            </a:r>
+          </a:p>
+        </p:txBody>
+      </p:sp>
+      <p:pic>
+        <p:nvPicPr>
+          <p:cNvPr id="6" name="Graphic 5">
+            <a:extLst>
+              <a:ext uri="{FF2B5EF4-FFF2-40B4-BE49-F238E27FC236}">
+                <a16:creationId xmlns:a16="http://schemas.microsoft.com/office/drawing/2014/main" id="{FEDB4B62-1C11-7250-77B1-FE4EB35EB7FA}"/>
+              </a:ext>
+            </a:extLst>
+          </p:cNvPr>
+          <p:cNvPicPr>
+            <a:picLocks/>
+          </p:cNvPicPr>
+          <p:nvPr/>
+        </p:nvPicPr>
+        <p:blipFill>
+          <a:blip r:embed="rId8">
+            <a:extLst>
+              <a:ext uri="{96DAC541-7B7A-43D3-8B79-37D633B846F1}">
+                <asvg:svgBlip xmlns:asvg="http://schemas.microsoft.com/office/drawing/2016/SVG/main" r:embed="rId9"/>
+              </a:ext>
+            </a:extLst>
+          </a:blip>
+          <a:stretch>
+            <a:fillRect/>
+          </a:stretch>
+        </p:blipFill>
+        <p:spPr>
+          <a:xfrm>
+            <a:off x="296462" y="6190785"/>
+            <a:ext cx="296462" cy="296462"/>
+          </a:xfrm>
+          <a:prstGeom prst="rect">
+            <a:avLst/>
+          </a:prstGeom>
+        </p:spPr>
+      </p:pic>
+      <p:sp>
+        <p:nvSpPr>
+          <p:cNvPr id="7" name="Trapezoid 6">
+            <a:extLst>
+              <a:ext uri="{FF2B5EF4-FFF2-40B4-BE49-F238E27FC236}">
+                <a16:creationId xmlns:a16="http://schemas.microsoft.com/office/drawing/2014/main" id="{742D59CB-A46C-1EF3-84FF-B1E1FEAF84D0}"/>
+              </a:ext>
+            </a:extLst>
+          </p:cNvPr>
+          <p:cNvSpPr/>
+          <p:nvPr/>
+        </p:nvSpPr>
+        <p:spPr>
+          <a:xfrm rot="2700000">
+            <a:off x="9620371" y="514924"/>
+            <a:ext cx="3335198" cy="778213"/>
+          </a:xfrm>
+          <a:prstGeom prst="trapezoid">
+            <a:avLst>
+              <a:gd name="adj" fmla="val 100000"/>
+            </a:avLst>
+          </a:prstGeom>
+          <a:solidFill>
+            <a:srgbClr val="EDFAF2"/>
+          </a:solidFill>
+          <a:ln w="25400" cap="flat" cmpd="sng" algn="ctr">
+            <a:noFill/>
+            <a:prstDash val="solid"/>
+          </a:ln>
+          <a:effectLst/>
+          <a:extLst>
+            <a:ext uri="{91240B29-F687-4F45-9708-019B960494DF}">
+              <a14:hiddenLine xmlns:a14="http://schemas.microsoft.com/office/drawing/2010/main" w="25400" cap="flat" cmpd="sng" algn="ctr">
+                <a:solidFill>
+                  <a:schemeClr val="accent1">
+                    <a:shade val="15000"/>
+                  </a:schemeClr>
+                </a:solidFill>
+                <a:prstDash val="solid"/>
+              </a14:hiddenLine>
+            </a:ext>
+          </a:extLst>
+        </p:spPr>
+        <p:style>
+          <a:lnRef idx="2">
+            <a:schemeClr val="accent1">
+              <a:shade val="15000"/>
+            </a:schemeClr>
+          </a:lnRef>
+          <a:fillRef idx="1">
+            <a:schemeClr val="accent1"/>
+          </a:fillRef>
+          <a:effectRef idx="0">
+            <a:schemeClr val="accent1"/>
+          </a:effectRef>
+          <a:fontRef idx="minor">
+            <a:schemeClr val="lt1"/>
+          </a:fontRef>
+        </p:style>
+        <p:txBody>
+          <a:bodyPr tIns="0" bIns="0" rtlCol="0" anchor="t">
+            <a:normAutofit fontScale="70000" lnSpcReduction="20000"/>
+          </a:bodyPr>
+          <a:lstStyle/>
+          <a:p>
+            <a:pPr algn="ctr"/>
+            <a:r>
+              <a:rPr lang="en-US" sz="2600" b="1">
+                <a:solidFill>
+                  <a:srgbClr val="198038"/>
+                </a:solidFill>
+              </a:rPr>
+              <a:t>Do not edit
+</a:t>
+            </a:r>
+            <a:r>
+              <a:rPr lang="en-US" sz="2200">
+                <a:solidFill>
+                  <a:srgbClr val="198038"/>
+                </a:solidFill>
+                <a:hlinkClick r:id="rId10">
+                  <a:extLst>
+                    <a:ext uri="{A12FA001-AC4F-418D-AE19-62706E023703}">
+                      <ahyp:hlinkClr xmlns:ahyp="http://schemas.microsoft.com/office/drawing/2018/hyperlinkcolor" val="tx"/>
+                    </a:ext>
+                  </a:extLst>
+                </a:hlinkClick>
+              </a:rPr>
+              <a:t>How to change the design</a:t>
+            </a:r>
+            <a:endParaRPr lang="en-US" sz="2200">
+              <a:solidFill>
+                <a:srgbClr val="198038"/>
+              </a:solidFill>
+            </a:endParaRPr>
+          </a:p>
+        </p:txBody>
+      </p:sp>
+      <p:pic>
+        <p:nvPicPr>
+          <p:cNvPr id="9" name="Graphic 8">
+            <a:extLst>
+              <a:ext uri="{FF2B5EF4-FFF2-40B4-BE49-F238E27FC236}">
+                <a16:creationId xmlns:a16="http://schemas.microsoft.com/office/drawing/2014/main" id="{E06B25FB-C9AD-D6F8-7022-D20B71126CAC}"/>
+              </a:ext>
+            </a:extLst>
+          </p:cNvPr>
+          <p:cNvPicPr>
+            <a:picLocks/>
+          </p:cNvPicPr>
+          <p:nvPr/>
+        </p:nvPicPr>
+        <p:blipFill>
+          <a:blip r:embed="rId11">
+            <a:extLst>
+              <a:ext uri="{96DAC541-7B7A-43D3-8B79-37D633B846F1}">
+                <asvg:svgBlip xmlns:asvg="http://schemas.microsoft.com/office/drawing/2016/SVG/main" r:embed="rId12"/>
+              </a:ext>
+            </a:extLst>
+          </a:blip>
+          <a:stretch>
+            <a:fillRect/>
+          </a:stretch>
+        </p:blipFill>
+        <p:spPr>
+          <a:xfrm>
+            <a:off x="10746748" y="6153727"/>
+            <a:ext cx="1111733" cy="370578"/>
+          </a:xfrm>
+          <a:prstGeom prst="rect">
+            <a:avLst/>
+          </a:prstGeom>
+        </p:spPr>
+      </p:pic>
+    </p:spTree>
+    <p:custDataLst>
+      <p:tags r:id="rId1"/>
+    </p:custDataLst>
+    <p:extLst>
+      <p:ext uri="{BB962C8B-B14F-4D97-AF65-F5344CB8AC3E}">
+        <p14:creationId xmlns:p14="http://schemas.microsoft.com/office/powerpoint/2010/main" val="910772388"/>
+      </p:ext>
+    </p:extLst>
+  </p:cSld>
+  <p:clrMapOvr>
+    <a:masterClrMapping/>
+  </p:clrMapOvr>
+  <p:timing>
+    <p:tnLst>
+      <p:par>
+        <p:cTn id="1" dur="indefinite" restart="never" nodeType="tmRoot">
+          <p:childTnLst>
+            <p:seq concurrent="1" nextAc="seek">
+              <p:cTn id="2" dur="indefinite" nodeType="mainSeq">
+                <p:childTnLst>
+                  <p:par>
+                    <p:cTn id="3" fill="hold">
+                      <p:stCondLst>
+                        <p:cond delay="indefinite"/>
+                      </p:stCondLst>
+                      <p:childTnLst>
+                        <p:par>
+                          <p:cTn id="4" fill="hold">
+                            <p:stCondLst>
+                              <p:cond delay="0"/>
+                            </p:stCondLst>
+                            <p:childTnLst>
+                              <p:par>
+                                <p:cTn id="5" presetID="26" presetClass="emph" presetSubtype="0" fill="hold" grpId="0" nodeType="clickEffect">
+                                  <p:stCondLst>
+                                    <p:cond delay="0"/>
+                                  </p:stCondLst>
+                                  <p:childTnLst>
+                                    <p:animEffect transition="out" filter="fade">
+                                      <p:cBhvr>
+                                        <p:cTn id="6" dur="50" tmFilter="0, 0; .2, .5; .8, .5; 1, 0"/>
+                                        <p:tgtEl>
+                                          <p:spTgt spid="3"/>
+                                        </p:tgtEl>
+                                      </p:cBhvr>
+                                    </p:animEffect>
+                                    <p:animScale>
+                                      <p:cBhvr>
+                                        <p:cTn id="7" dur="25" autoRev="1" fill="hold"/>
+                                        <p:tgtEl>
+                                          <p:spTgt spid="3"/>
+                                        </p:tgtEl>
+                                      </p:cBhvr>
+                                      <p:by x="105000" y="105000"/>
+                                    </p:animScale>
+                                  </p:childTnLst>
+                                </p:cTn>
+                              </p:par>
+                            </p:childTnLst>
+                          </p:cTn>
+                        </p:par>
+                      </p:childTnLst>
+                    </p:cTn>
+                  </p:par>
+                </p:childTnLst>
+              </p:cTn>
+              <p:prevCondLst>
+                <p:cond evt="onPrev" delay="0">
+                  <p:tgtEl>
+                    <p:sldTgt/>
+                  </p:tgtEl>
+                </p:cond>
+              </p:prevCondLst>
+              <p:nextCondLst>
+                <p:cond evt="onNext" delay="0">
+                  <p:tgtEl>
+                    <p:sldTgt/>
+                  </p:tgtEl>
+                </p:cond>
+              </p:nextCondLst>
+            </p:seq>
+          </p:childTnLst>
+        </p:cTn>
+      </p:par>
+    </p:tnLst>
+    <p:bldLst>
+      <p:bldP spid="3" grpId="0" animBg="1"/>
+    </p:bldLst>
+  </p:timing>
+</p:sld>
+</file>
+
+<file path=ppt/slides/slide35.xml><?xml version="1.0" encoding="utf-8"?>
 <p:sld xmlns:a="http://schemas.openxmlformats.org/drawingml/2006/main" xmlns:r="http://schemas.openxmlformats.org/officeDocument/2006/relationships" xmlns:p="http://schemas.openxmlformats.org/presentationml/2006/main">
   <p:cSld>
     <p:spTree>
@@ -24342,7 +24869,7 @@
 </p:sld>
 </file>
 
-<file path=ppt/slides/slide35.xml><?xml version="1.0" encoding="utf-8"?>
+<file path=ppt/slides/slide36.xml><?xml version="1.0" encoding="utf-8"?>
 <p:sld xmlns:a="http://schemas.openxmlformats.org/drawingml/2006/main" xmlns:r="http://schemas.openxmlformats.org/officeDocument/2006/relationships" xmlns:p="http://schemas.openxmlformats.org/presentationml/2006/main">
   <p:cSld>
     <p:spTree>
@@ -28246,7 +28773,7 @@
 </p:sld>
 </file>
 
-<file path=ppt/slides/slide36.xml><?xml version="1.0" encoding="utf-8"?>
+<file path=ppt/slides/slide37.xml><?xml version="1.0" encoding="utf-8"?>
 <p:sld xmlns:a="http://schemas.openxmlformats.org/drawingml/2006/main" xmlns:r="http://schemas.openxmlformats.org/officeDocument/2006/relationships" xmlns:p="http://schemas.openxmlformats.org/presentationml/2006/main">
   <p:cSld>
     <p:spTree>
@@ -28724,7 +29251,7 @@
 </p:sld>
 </file>
 
-<file path=ppt/slides/slide37.xml><?xml version="1.0" encoding="utf-8"?>
+<file path=ppt/slides/slide38.xml><?xml version="1.0" encoding="utf-8"?>
 <p:sld xmlns:a="http://schemas.openxmlformats.org/drawingml/2006/main" xmlns:r="http://schemas.openxmlformats.org/officeDocument/2006/relationships" xmlns:p="http://schemas.openxmlformats.org/presentationml/2006/main">
   <p:cSld>
     <p:spTree>
@@ -31357,7 +31884,7 @@
 </p:sld>
 </file>
 
-<file path=ppt/slides/slide38.xml><?xml version="1.0" encoding="utf-8"?>
+<file path=ppt/slides/slide39.xml><?xml version="1.0" encoding="utf-8"?>
 <p:sld xmlns:a="http://schemas.openxmlformats.org/drawingml/2006/main" xmlns:r="http://schemas.openxmlformats.org/officeDocument/2006/relationships" xmlns:p="http://schemas.openxmlformats.org/presentationml/2006/main">
   <p:cSld>
     <p:spTree>
@@ -32497,7 +33024,533 @@
 </p:sld>
 </file>
 
-<file path=ppt/slides/slide39.xml><?xml version="1.0" encoding="utf-8"?>
+<file path=ppt/slides/slide4.xml><?xml version="1.0" encoding="utf-8"?>
+<p:sld xmlns:a="http://schemas.openxmlformats.org/drawingml/2006/main" xmlns:r="http://schemas.openxmlformats.org/officeDocument/2006/relationships" xmlns:p="http://schemas.openxmlformats.org/presentationml/2006/main" showMasterSp="0">
+  <p:cSld>
+    <p:bg>
+      <p:bgPr>
+        <a:solidFill>
+          <a:srgbClr val="FFFFFF"/>
+        </a:solidFill>
+        <a:effectLst/>
+      </p:bgPr>
+    </p:bg>
+    <p:spTree>
+      <p:nvGrpSpPr>
+        <p:cNvPr id="1" name=""/>
+        <p:cNvGrpSpPr/>
+        <p:nvPr/>
+      </p:nvGrpSpPr>
+      <p:grpSpPr>
+        <a:xfrm>
+          <a:off x="0" y="0"/>
+          <a:ext cx="0" cy="0"/>
+          <a:chOff x="0" y="0"/>
+          <a:chExt cx="0" cy="0"/>
+        </a:xfrm>
+      </p:grpSpPr>
+      <p:sp>
+        <p:nvSpPr>
+          <p:cNvPr id="2" name="Rectangle 1">
+            <a:extLst>
+              <a:ext uri="{FF2B5EF4-FFF2-40B4-BE49-F238E27FC236}">
+                <a16:creationId xmlns:a16="http://schemas.microsoft.com/office/drawing/2014/main" id="{71D4F718-8738-88A4-E1D4-CFD3EB1D23D6}"/>
+              </a:ext>
+            </a:extLst>
+          </p:cNvPr>
+          <p:cNvSpPr/>
+          <p:nvPr>
+            <p:custDataLst>
+              <p:tags r:id="rId2"/>
+            </p:custDataLst>
+          </p:nvPr>
+        </p:nvSpPr>
+        <p:spPr>
+          <a:xfrm>
+            <a:off x="444693" y="1742703"/>
+            <a:ext cx="2371696" cy="2371696"/>
+          </a:xfrm>
+          <a:prstGeom prst="rect">
+            <a:avLst/>
+          </a:prstGeom>
+          <a:blipFill>
+            <a:blip r:embed="rId6">
+              <a:extLst>
+                <a:ext uri="{96DAC541-7B7A-43D3-8B79-37D633B846F1}">
+                  <asvg:svgBlip xmlns:asvg="http://schemas.microsoft.com/office/drawing/2016/SVG/main" r:embed="rId7"/>
+                </a:ext>
+              </a:extLst>
+            </a:blip>
+            <a:stretch>
+              <a:fillRect/>
+            </a:stretch>
+          </a:blipFill>
+          <a:ln>
+            <a:solidFill>
+              <a:srgbClr val="FFFFFF"/>
+            </a:solidFill>
+          </a:ln>
+        </p:spPr>
+        <p:style>
+          <a:lnRef idx="2">
+            <a:schemeClr val="accent1">
+              <a:shade val="15000"/>
+            </a:schemeClr>
+          </a:lnRef>
+          <a:fillRef idx="1">
+            <a:schemeClr val="accent1"/>
+          </a:fillRef>
+          <a:effectRef idx="0">
+            <a:schemeClr val="accent1"/>
+          </a:effectRef>
+          <a:fontRef idx="minor">
+            <a:schemeClr val="lt1"/>
+          </a:fontRef>
+        </p:style>
+        <p:txBody>
+          <a:bodyPr rtlCol="0" anchor="ctr"/>
+          <a:lstStyle/>
+          <a:p>
+            <a:pPr algn="ctr"/>
+            <a:endParaRPr lang="en-US"/>
+          </a:p>
+        </p:txBody>
+      </p:sp>
+      <p:sp>
+        <p:nvSpPr>
+          <p:cNvPr id="3" name="Rectangle 2">
+            <a:extLst>
+              <a:ext uri="{FF2B5EF4-FFF2-40B4-BE49-F238E27FC236}">
+                <a16:creationId xmlns:a16="http://schemas.microsoft.com/office/drawing/2014/main" id="{76AA0375-A7E3-904A-036E-8D3EE2850AFD}"/>
+              </a:ext>
+            </a:extLst>
+          </p:cNvPr>
+          <p:cNvSpPr/>
+          <p:nvPr>
+            <p:custDataLst>
+              <p:tags r:id="rId3"/>
+            </p:custDataLst>
+          </p:nvPr>
+        </p:nvSpPr>
+        <p:spPr>
+          <a:xfrm>
+            <a:off x="3112851" y="1000897"/>
+            <a:ext cx="8486226" cy="3855308"/>
+          </a:xfrm>
+          <a:prstGeom prst="rect">
+            <a:avLst/>
+          </a:prstGeom>
+          <a:noFill/>
+          <a:ln w="25400" cap="flat" cmpd="sng" algn="ctr">
+            <a:solidFill>
+              <a:srgbClr val="FFFFFF"/>
+            </a:solidFill>
+            <a:prstDash val="solid"/>
+          </a:ln>
+          <a:effectLst/>
+          <a:extLst>
+            <a:ext uri="{909E8E84-426E-40DD-AFC4-6F175D3DCCD1}">
+              <a14:hiddenFill xmlns:a14="http://schemas.microsoft.com/office/drawing/2010/main">
+                <a:solidFill>
+                  <a:schemeClr val="accent1"/>
+                </a:solidFill>
+              </a14:hiddenFill>
+            </a:ext>
+          </a:extLst>
+        </p:spPr>
+        <p:style>
+          <a:lnRef idx="2">
+            <a:schemeClr val="accent1">
+              <a:shade val="15000"/>
+            </a:schemeClr>
+          </a:lnRef>
+          <a:fillRef idx="1">
+            <a:schemeClr val="accent1"/>
+          </a:fillRef>
+          <a:effectRef idx="0">
+            <a:schemeClr val="accent1"/>
+          </a:effectRef>
+          <a:fontRef idx="minor">
+            <a:schemeClr val="lt1"/>
+          </a:fontRef>
+        </p:style>
+        <p:txBody>
+          <a:bodyPr rtlCol="0" anchor="ctr"/>
+          <a:lstStyle/>
+          <a:p>
+            <a:r>
+              <a:rPr lang="en-US" sz="3700" b="1">
+                <a:solidFill>
+                  <a:srgbClr val="000000"/>
+                </a:solidFill>
+              </a:rPr>
+              <a:t>What model selection strategy is your group considering for the Donors Choose project?
+</a:t>
+            </a:r>
+          </a:p>
+        </p:txBody>
+      </p:sp>
+      <p:sp>
+        <p:nvSpPr>
+          <p:cNvPr id="4" name="Rectangle 3">
+            <a:extLst>
+              <a:ext uri="{FF2B5EF4-FFF2-40B4-BE49-F238E27FC236}">
+                <a16:creationId xmlns:a16="http://schemas.microsoft.com/office/drawing/2014/main" id="{BBCE8261-B973-7486-7CA8-49BF3178EB3B}"/>
+              </a:ext>
+            </a:extLst>
+          </p:cNvPr>
+          <p:cNvSpPr/>
+          <p:nvPr/>
+        </p:nvSpPr>
+        <p:spPr>
+          <a:xfrm>
+            <a:off x="0" y="5820032"/>
+            <a:ext cx="12192001" cy="1037968"/>
+          </a:xfrm>
+          <a:prstGeom prst="rect">
+            <a:avLst/>
+          </a:prstGeom>
+          <a:solidFill>
+            <a:srgbClr val="198038"/>
+          </a:solidFill>
+          <a:ln w="25400" cap="flat" cmpd="sng" algn="ctr">
+            <a:noFill/>
+            <a:prstDash val="solid"/>
+          </a:ln>
+          <a:effectLst/>
+          <a:extLst>
+            <a:ext uri="{91240B29-F687-4F45-9708-019B960494DF}">
+              <a14:hiddenLine xmlns:a14="http://schemas.microsoft.com/office/drawing/2010/main" w="25400" cap="flat" cmpd="sng" algn="ctr">
+                <a:solidFill>
+                  <a:schemeClr val="accent1">
+                    <a:shade val="15000"/>
+                  </a:schemeClr>
+                </a:solidFill>
+                <a:prstDash val="solid"/>
+              </a14:hiddenLine>
+            </a:ext>
+          </a:extLst>
+        </p:spPr>
+        <p:style>
+          <a:lnRef idx="2">
+            <a:schemeClr val="accent1">
+              <a:shade val="15000"/>
+            </a:schemeClr>
+          </a:lnRef>
+          <a:fillRef idx="1">
+            <a:schemeClr val="accent1"/>
+          </a:fillRef>
+          <a:effectRef idx="0">
+            <a:schemeClr val="accent1"/>
+          </a:effectRef>
+          <a:fontRef idx="minor">
+            <a:schemeClr val="lt1"/>
+          </a:fontRef>
+        </p:style>
+        <p:txBody>
+          <a:bodyPr lIns="741155" tIns="259492" rIns="1852888" bIns="203886" rtlCol="0" anchor="ctr">
+            <a:normAutofit fontScale="85000" lnSpcReduction="10000"/>
+          </a:bodyPr>
+          <a:lstStyle/>
+          <a:p>
+            <a:r>
+              <a:rPr lang="en-US" sz="2600">
+                <a:solidFill>
+                  <a:srgbClr val="FFFFFF"/>
+                </a:solidFill>
+              </a:rPr>
+              <a:t>The </a:t>
+            </a:r>
+            <a:r>
+              <a:rPr lang="en-US" sz="2600">
+                <a:solidFill>
+                  <a:srgbClr val="FFFFFF"/>
+                </a:solidFill>
+                <a:hlinkClick r:id="rId8">
+                  <a:extLst>
+                    <a:ext uri="{A12FA001-AC4F-418D-AE19-62706E023703}">
+                      <ahyp:hlinkClr xmlns:ahyp="http://schemas.microsoft.com/office/drawing/2018/hyperlinkcolor" val="tx"/>
+                    </a:ext>
+                  </a:extLst>
+                </a:hlinkClick>
+              </a:rPr>
+              <a:t>Slido app</a:t>
+            </a:r>
+            <a:r>
+              <a:rPr lang="en-US" sz="2600">
+                <a:solidFill>
+                  <a:srgbClr val="FFFFFF"/>
+                </a:solidFill>
+              </a:rPr>
+              <a:t> must be installed on every computer you’re presenting from</a:t>
+            </a:r>
+          </a:p>
+        </p:txBody>
+      </p:sp>
+      <p:pic>
+        <p:nvPicPr>
+          <p:cNvPr id="6" name="Graphic 5">
+            <a:extLst>
+              <a:ext uri="{FF2B5EF4-FFF2-40B4-BE49-F238E27FC236}">
+                <a16:creationId xmlns:a16="http://schemas.microsoft.com/office/drawing/2014/main" id="{422A0AC7-B4E5-99C3-395B-0C2A9E11CBD6}"/>
+              </a:ext>
+            </a:extLst>
+          </p:cNvPr>
+          <p:cNvPicPr>
+            <a:picLocks/>
+          </p:cNvPicPr>
+          <p:nvPr/>
+        </p:nvPicPr>
+        <p:blipFill>
+          <a:blip r:embed="rId9">
+            <a:extLst>
+              <a:ext uri="{96DAC541-7B7A-43D3-8B79-37D633B846F1}">
+                <asvg:svgBlip xmlns:asvg="http://schemas.microsoft.com/office/drawing/2016/SVG/main" r:embed="rId10"/>
+              </a:ext>
+            </a:extLst>
+          </a:blip>
+          <a:stretch>
+            <a:fillRect/>
+          </a:stretch>
+        </p:blipFill>
+        <p:spPr>
+          <a:xfrm>
+            <a:off x="296462" y="6190785"/>
+            <a:ext cx="296462" cy="296462"/>
+          </a:xfrm>
+          <a:prstGeom prst="rect">
+            <a:avLst/>
+          </a:prstGeom>
+        </p:spPr>
+      </p:pic>
+      <p:sp>
+        <p:nvSpPr>
+          <p:cNvPr id="7" name="Trapezoid 6">
+            <a:extLst>
+              <a:ext uri="{FF2B5EF4-FFF2-40B4-BE49-F238E27FC236}">
+                <a16:creationId xmlns:a16="http://schemas.microsoft.com/office/drawing/2014/main" id="{139E3585-2076-D5F6-D46E-15BE2332FA36}"/>
+              </a:ext>
+            </a:extLst>
+          </p:cNvPr>
+          <p:cNvSpPr/>
+          <p:nvPr/>
+        </p:nvSpPr>
+        <p:spPr>
+          <a:xfrm rot="2700000">
+            <a:off x="9620371" y="514924"/>
+            <a:ext cx="3335198" cy="778213"/>
+          </a:xfrm>
+          <a:prstGeom prst="trapezoid">
+            <a:avLst>
+              <a:gd name="adj" fmla="val 100000"/>
+            </a:avLst>
+          </a:prstGeom>
+          <a:solidFill>
+            <a:srgbClr val="EDFAF2"/>
+          </a:solidFill>
+          <a:ln w="25400" cap="flat" cmpd="sng" algn="ctr">
+            <a:noFill/>
+            <a:prstDash val="solid"/>
+          </a:ln>
+          <a:effectLst/>
+          <a:extLst>
+            <a:ext uri="{91240B29-F687-4F45-9708-019B960494DF}">
+              <a14:hiddenLine xmlns:a14="http://schemas.microsoft.com/office/drawing/2010/main" w="25400" cap="flat" cmpd="sng" algn="ctr">
+                <a:solidFill>
+                  <a:schemeClr val="accent1">
+                    <a:shade val="15000"/>
+                  </a:schemeClr>
+                </a:solidFill>
+                <a:prstDash val="solid"/>
+              </a14:hiddenLine>
+            </a:ext>
+          </a:extLst>
+        </p:spPr>
+        <p:style>
+          <a:lnRef idx="2">
+            <a:schemeClr val="accent1">
+              <a:shade val="15000"/>
+            </a:schemeClr>
+          </a:lnRef>
+          <a:fillRef idx="1">
+            <a:schemeClr val="accent1"/>
+          </a:fillRef>
+          <a:effectRef idx="0">
+            <a:schemeClr val="accent1"/>
+          </a:effectRef>
+          <a:fontRef idx="minor">
+            <a:schemeClr val="lt1"/>
+          </a:fontRef>
+        </p:style>
+        <p:txBody>
+          <a:bodyPr tIns="0" bIns="0" rtlCol="0" anchor="t">
+            <a:normAutofit fontScale="70000" lnSpcReduction="20000"/>
+          </a:bodyPr>
+          <a:lstStyle/>
+          <a:p>
+            <a:pPr algn="ctr"/>
+            <a:r>
+              <a:rPr lang="en-US" sz="2600" b="1" dirty="0">
+                <a:solidFill>
+                  <a:srgbClr val="198038"/>
+                </a:solidFill>
+              </a:rPr>
+              <a:t>Do not edit
+</a:t>
+            </a:r>
+            <a:r>
+              <a:rPr lang="en-US" sz="2200" dirty="0">
+                <a:solidFill>
+                  <a:srgbClr val="198038"/>
+                </a:solidFill>
+                <a:hlinkClick r:id="rId11">
+                  <a:extLst>
+                    <a:ext uri="{A12FA001-AC4F-418D-AE19-62706E023703}">
+                      <ahyp:hlinkClr xmlns:ahyp="http://schemas.microsoft.com/office/drawing/2018/hyperlinkcolor" val="tx"/>
+                    </a:ext>
+                  </a:extLst>
+                </a:hlinkClick>
+              </a:rPr>
+              <a:t>How to change the design</a:t>
+            </a:r>
+            <a:endParaRPr lang="en-US" sz="2200" dirty="0">
+              <a:solidFill>
+                <a:srgbClr val="198038"/>
+              </a:solidFill>
+            </a:endParaRPr>
+          </a:p>
+        </p:txBody>
+      </p:sp>
+      <p:pic>
+        <p:nvPicPr>
+          <p:cNvPr id="9" name="Graphic 8">
+            <a:extLst>
+              <a:ext uri="{FF2B5EF4-FFF2-40B4-BE49-F238E27FC236}">
+                <a16:creationId xmlns:a16="http://schemas.microsoft.com/office/drawing/2014/main" id="{E43D7BBD-4F5A-B35D-283F-AE01D08F9261}"/>
+              </a:ext>
+            </a:extLst>
+          </p:cNvPr>
+          <p:cNvPicPr>
+            <a:picLocks/>
+          </p:cNvPicPr>
+          <p:nvPr/>
+        </p:nvPicPr>
+        <p:blipFill>
+          <a:blip r:embed="rId12">
+            <a:extLst>
+              <a:ext uri="{96DAC541-7B7A-43D3-8B79-37D633B846F1}">
+                <asvg:svgBlip xmlns:asvg="http://schemas.microsoft.com/office/drawing/2016/SVG/main" r:embed="rId13"/>
+              </a:ext>
+            </a:extLst>
+          </a:blip>
+          <a:stretch>
+            <a:fillRect/>
+          </a:stretch>
+        </p:blipFill>
+        <p:spPr>
+          <a:xfrm>
+            <a:off x="10746748" y="6153727"/>
+            <a:ext cx="1111733" cy="370578"/>
+          </a:xfrm>
+          <a:prstGeom prst="rect">
+            <a:avLst/>
+          </a:prstGeom>
+        </p:spPr>
+      </p:pic>
+    </p:spTree>
+    <p:custDataLst>
+      <p:tags r:id="rId1"/>
+    </p:custDataLst>
+    <p:extLst>
+      <p:ext uri="{BB962C8B-B14F-4D97-AF65-F5344CB8AC3E}">
+        <p14:creationId xmlns:p14="http://schemas.microsoft.com/office/powerpoint/2010/main" val="4202054108"/>
+      </p:ext>
+    </p:extLst>
+  </p:cSld>
+  <p:clrMapOvr>
+    <a:masterClrMapping/>
+  </p:clrMapOvr>
+  <p:timing>
+    <p:tnLst>
+      <p:par>
+        <p:cTn id="1" dur="indefinite" restart="never" nodeType="tmRoot">
+          <p:childTnLst>
+            <p:seq concurrent="1" nextAc="seek">
+              <p:cTn id="2" dur="indefinite" nodeType="mainSeq">
+                <p:childTnLst>
+                  <p:par>
+                    <p:cTn id="3" fill="hold">
+                      <p:stCondLst>
+                        <p:cond delay="indefinite"/>
+                      </p:stCondLst>
+                      <p:childTnLst>
+                        <p:par>
+                          <p:cTn id="4" fill="hold">
+                            <p:stCondLst>
+                              <p:cond delay="0"/>
+                            </p:stCondLst>
+                            <p:childTnLst>
+                              <p:par>
+                                <p:cTn id="5" presetID="26" presetClass="emph" presetSubtype="0" fill="hold" grpId="0" nodeType="clickEffect">
+                                  <p:stCondLst>
+                                    <p:cond delay="0"/>
+                                  </p:stCondLst>
+                                  <p:childTnLst>
+                                    <p:animEffect transition="out" filter="fade">
+                                      <p:cBhvr>
+                                        <p:cTn id="6" dur="50" tmFilter="0, 0; .2, .5; .8, .5; 1, 0"/>
+                                        <p:tgtEl>
+                                          <p:spTgt spid="3"/>
+                                        </p:tgtEl>
+                                      </p:cBhvr>
+                                    </p:animEffect>
+                                    <p:animScale>
+                                      <p:cBhvr>
+                                        <p:cTn id="7" dur="25" autoRev="1" fill="hold"/>
+                                        <p:tgtEl>
+                                          <p:spTgt spid="3"/>
+                                        </p:tgtEl>
+                                      </p:cBhvr>
+                                      <p:by x="105000" y="105000"/>
+                                    </p:animScale>
+                                  </p:childTnLst>
+                                </p:cTn>
+                              </p:par>
+                            </p:childTnLst>
+                          </p:cTn>
+                        </p:par>
+                      </p:childTnLst>
+                    </p:cTn>
+                  </p:par>
+                </p:childTnLst>
+              </p:cTn>
+              <p:prevCondLst>
+                <p:cond evt="onPrev" delay="0">
+                  <p:tgtEl>
+                    <p:sldTgt/>
+                  </p:tgtEl>
+                </p:cond>
+              </p:prevCondLst>
+              <p:nextCondLst>
+                <p:cond evt="onNext" delay="0">
+                  <p:tgtEl>
+                    <p:sldTgt/>
+                  </p:tgtEl>
+                </p:cond>
+              </p:nextCondLst>
+            </p:seq>
+          </p:childTnLst>
+        </p:cTn>
+      </p:par>
+    </p:tnLst>
+    <p:bldLst>
+      <p:bldP spid="3" grpId="0" animBg="1"/>
+    </p:bldLst>
+  </p:timing>
+</p:sld>
+</file>
+
+<file path=ppt/slides/slide40.xml><?xml version="1.0" encoding="utf-8"?>
 <p:sld xmlns:a="http://schemas.openxmlformats.org/drawingml/2006/main" xmlns:r="http://schemas.openxmlformats.org/officeDocument/2006/relationships" xmlns:p="http://schemas.openxmlformats.org/presentationml/2006/main">
   <p:cSld>
     <p:spTree>
@@ -33636,533 +34689,7 @@
 </p:sld>
 </file>
 
-<file path=ppt/slides/slide4.xml><?xml version="1.0" encoding="utf-8"?>
-<p:sld xmlns:a="http://schemas.openxmlformats.org/drawingml/2006/main" xmlns:r="http://schemas.openxmlformats.org/officeDocument/2006/relationships" xmlns:p="http://schemas.openxmlformats.org/presentationml/2006/main" showMasterSp="0">
-  <p:cSld>
-    <p:bg>
-      <p:bgPr>
-        <a:solidFill>
-          <a:srgbClr val="FFFFFF"/>
-        </a:solidFill>
-        <a:effectLst/>
-      </p:bgPr>
-    </p:bg>
-    <p:spTree>
-      <p:nvGrpSpPr>
-        <p:cNvPr id="1" name=""/>
-        <p:cNvGrpSpPr/>
-        <p:nvPr/>
-      </p:nvGrpSpPr>
-      <p:grpSpPr>
-        <a:xfrm>
-          <a:off x="0" y="0"/>
-          <a:ext cx="0" cy="0"/>
-          <a:chOff x="0" y="0"/>
-          <a:chExt cx="0" cy="0"/>
-        </a:xfrm>
-      </p:grpSpPr>
-      <p:sp>
-        <p:nvSpPr>
-          <p:cNvPr id="2" name="Rectangle 1">
-            <a:extLst>
-              <a:ext uri="{FF2B5EF4-FFF2-40B4-BE49-F238E27FC236}">
-                <a16:creationId xmlns:a16="http://schemas.microsoft.com/office/drawing/2014/main" id="{71D4F718-8738-88A4-E1D4-CFD3EB1D23D6}"/>
-              </a:ext>
-            </a:extLst>
-          </p:cNvPr>
-          <p:cNvSpPr/>
-          <p:nvPr>
-            <p:custDataLst>
-              <p:tags r:id="rId2"/>
-            </p:custDataLst>
-          </p:nvPr>
-        </p:nvSpPr>
-        <p:spPr>
-          <a:xfrm>
-            <a:off x="444693" y="1742703"/>
-            <a:ext cx="2371696" cy="2371696"/>
-          </a:xfrm>
-          <a:prstGeom prst="rect">
-            <a:avLst/>
-          </a:prstGeom>
-          <a:blipFill>
-            <a:blip r:embed="rId6">
-              <a:extLst>
-                <a:ext uri="{96DAC541-7B7A-43D3-8B79-37D633B846F1}">
-                  <asvg:svgBlip xmlns:asvg="http://schemas.microsoft.com/office/drawing/2016/SVG/main" r:embed="rId7"/>
-                </a:ext>
-              </a:extLst>
-            </a:blip>
-            <a:stretch>
-              <a:fillRect/>
-            </a:stretch>
-          </a:blipFill>
-          <a:ln>
-            <a:solidFill>
-              <a:srgbClr val="FFFFFF"/>
-            </a:solidFill>
-          </a:ln>
-        </p:spPr>
-        <p:style>
-          <a:lnRef idx="2">
-            <a:schemeClr val="accent1">
-              <a:shade val="15000"/>
-            </a:schemeClr>
-          </a:lnRef>
-          <a:fillRef idx="1">
-            <a:schemeClr val="accent1"/>
-          </a:fillRef>
-          <a:effectRef idx="0">
-            <a:schemeClr val="accent1"/>
-          </a:effectRef>
-          <a:fontRef idx="minor">
-            <a:schemeClr val="lt1"/>
-          </a:fontRef>
-        </p:style>
-        <p:txBody>
-          <a:bodyPr rtlCol="0" anchor="ctr"/>
-          <a:lstStyle/>
-          <a:p>
-            <a:pPr algn="ctr"/>
-            <a:endParaRPr lang="en-US"/>
-          </a:p>
-        </p:txBody>
-      </p:sp>
-      <p:sp>
-        <p:nvSpPr>
-          <p:cNvPr id="3" name="Rectangle 2">
-            <a:extLst>
-              <a:ext uri="{FF2B5EF4-FFF2-40B4-BE49-F238E27FC236}">
-                <a16:creationId xmlns:a16="http://schemas.microsoft.com/office/drawing/2014/main" id="{76AA0375-A7E3-904A-036E-8D3EE2850AFD}"/>
-              </a:ext>
-            </a:extLst>
-          </p:cNvPr>
-          <p:cNvSpPr/>
-          <p:nvPr>
-            <p:custDataLst>
-              <p:tags r:id="rId3"/>
-            </p:custDataLst>
-          </p:nvPr>
-        </p:nvSpPr>
-        <p:spPr>
-          <a:xfrm>
-            <a:off x="3112851" y="1000897"/>
-            <a:ext cx="8486226" cy="3855308"/>
-          </a:xfrm>
-          <a:prstGeom prst="rect">
-            <a:avLst/>
-          </a:prstGeom>
-          <a:noFill/>
-          <a:ln w="25400" cap="flat" cmpd="sng" algn="ctr">
-            <a:solidFill>
-              <a:srgbClr val="FFFFFF"/>
-            </a:solidFill>
-            <a:prstDash val="solid"/>
-          </a:ln>
-          <a:effectLst/>
-          <a:extLst>
-            <a:ext uri="{909E8E84-426E-40DD-AFC4-6F175D3DCCD1}">
-              <a14:hiddenFill xmlns:a14="http://schemas.microsoft.com/office/drawing/2010/main">
-                <a:solidFill>
-                  <a:schemeClr val="accent1"/>
-                </a:solidFill>
-              </a14:hiddenFill>
-            </a:ext>
-          </a:extLst>
-        </p:spPr>
-        <p:style>
-          <a:lnRef idx="2">
-            <a:schemeClr val="accent1">
-              <a:shade val="15000"/>
-            </a:schemeClr>
-          </a:lnRef>
-          <a:fillRef idx="1">
-            <a:schemeClr val="accent1"/>
-          </a:fillRef>
-          <a:effectRef idx="0">
-            <a:schemeClr val="accent1"/>
-          </a:effectRef>
-          <a:fontRef idx="minor">
-            <a:schemeClr val="lt1"/>
-          </a:fontRef>
-        </p:style>
-        <p:txBody>
-          <a:bodyPr rtlCol="0" anchor="ctr"/>
-          <a:lstStyle/>
-          <a:p>
-            <a:r>
-              <a:rPr lang="en-US" sz="3700" b="1">
-                <a:solidFill>
-                  <a:srgbClr val="000000"/>
-                </a:solidFill>
-              </a:rPr>
-              <a:t>What model selection strategy is your group considering for the Donors Choose project?
-</a:t>
-            </a:r>
-          </a:p>
-        </p:txBody>
-      </p:sp>
-      <p:sp>
-        <p:nvSpPr>
-          <p:cNvPr id="4" name="Rectangle 3">
-            <a:extLst>
-              <a:ext uri="{FF2B5EF4-FFF2-40B4-BE49-F238E27FC236}">
-                <a16:creationId xmlns:a16="http://schemas.microsoft.com/office/drawing/2014/main" id="{BBCE8261-B973-7486-7CA8-49BF3178EB3B}"/>
-              </a:ext>
-            </a:extLst>
-          </p:cNvPr>
-          <p:cNvSpPr/>
-          <p:nvPr/>
-        </p:nvSpPr>
-        <p:spPr>
-          <a:xfrm>
-            <a:off x="0" y="5820032"/>
-            <a:ext cx="12192001" cy="1037968"/>
-          </a:xfrm>
-          <a:prstGeom prst="rect">
-            <a:avLst/>
-          </a:prstGeom>
-          <a:solidFill>
-            <a:srgbClr val="198038"/>
-          </a:solidFill>
-          <a:ln w="25400" cap="flat" cmpd="sng" algn="ctr">
-            <a:noFill/>
-            <a:prstDash val="solid"/>
-          </a:ln>
-          <a:effectLst/>
-          <a:extLst>
-            <a:ext uri="{91240B29-F687-4F45-9708-019B960494DF}">
-              <a14:hiddenLine xmlns:a14="http://schemas.microsoft.com/office/drawing/2010/main" w="25400" cap="flat" cmpd="sng" algn="ctr">
-                <a:solidFill>
-                  <a:schemeClr val="accent1">
-                    <a:shade val="15000"/>
-                  </a:schemeClr>
-                </a:solidFill>
-                <a:prstDash val="solid"/>
-              </a14:hiddenLine>
-            </a:ext>
-          </a:extLst>
-        </p:spPr>
-        <p:style>
-          <a:lnRef idx="2">
-            <a:schemeClr val="accent1">
-              <a:shade val="15000"/>
-            </a:schemeClr>
-          </a:lnRef>
-          <a:fillRef idx="1">
-            <a:schemeClr val="accent1"/>
-          </a:fillRef>
-          <a:effectRef idx="0">
-            <a:schemeClr val="accent1"/>
-          </a:effectRef>
-          <a:fontRef idx="minor">
-            <a:schemeClr val="lt1"/>
-          </a:fontRef>
-        </p:style>
-        <p:txBody>
-          <a:bodyPr lIns="741155" tIns="259492" rIns="1852888" bIns="203886" rtlCol="0" anchor="ctr">
-            <a:normAutofit fontScale="85000" lnSpcReduction="10000"/>
-          </a:bodyPr>
-          <a:lstStyle/>
-          <a:p>
-            <a:r>
-              <a:rPr lang="en-US" sz="2600">
-                <a:solidFill>
-                  <a:srgbClr val="FFFFFF"/>
-                </a:solidFill>
-              </a:rPr>
-              <a:t>The </a:t>
-            </a:r>
-            <a:r>
-              <a:rPr lang="en-US" sz="2600">
-                <a:solidFill>
-                  <a:srgbClr val="FFFFFF"/>
-                </a:solidFill>
-                <a:hlinkClick r:id="rId8">
-                  <a:extLst>
-                    <a:ext uri="{A12FA001-AC4F-418D-AE19-62706E023703}">
-                      <ahyp:hlinkClr xmlns:ahyp="http://schemas.microsoft.com/office/drawing/2018/hyperlinkcolor" val="tx"/>
-                    </a:ext>
-                  </a:extLst>
-                </a:hlinkClick>
-              </a:rPr>
-              <a:t>Slido app</a:t>
-            </a:r>
-            <a:r>
-              <a:rPr lang="en-US" sz="2600">
-                <a:solidFill>
-                  <a:srgbClr val="FFFFFF"/>
-                </a:solidFill>
-              </a:rPr>
-              <a:t> must be installed on every computer you’re presenting from</a:t>
-            </a:r>
-          </a:p>
-        </p:txBody>
-      </p:sp>
-      <p:pic>
-        <p:nvPicPr>
-          <p:cNvPr id="6" name="Graphic 5">
-            <a:extLst>
-              <a:ext uri="{FF2B5EF4-FFF2-40B4-BE49-F238E27FC236}">
-                <a16:creationId xmlns:a16="http://schemas.microsoft.com/office/drawing/2014/main" id="{422A0AC7-B4E5-99C3-395B-0C2A9E11CBD6}"/>
-              </a:ext>
-            </a:extLst>
-          </p:cNvPr>
-          <p:cNvPicPr>
-            <a:picLocks/>
-          </p:cNvPicPr>
-          <p:nvPr/>
-        </p:nvPicPr>
-        <p:blipFill>
-          <a:blip r:embed="rId9">
-            <a:extLst>
-              <a:ext uri="{96DAC541-7B7A-43D3-8B79-37D633B846F1}">
-                <asvg:svgBlip xmlns:asvg="http://schemas.microsoft.com/office/drawing/2016/SVG/main" r:embed="rId10"/>
-              </a:ext>
-            </a:extLst>
-          </a:blip>
-          <a:stretch>
-            <a:fillRect/>
-          </a:stretch>
-        </p:blipFill>
-        <p:spPr>
-          <a:xfrm>
-            <a:off x="296462" y="6190785"/>
-            <a:ext cx="296462" cy="296462"/>
-          </a:xfrm>
-          <a:prstGeom prst="rect">
-            <a:avLst/>
-          </a:prstGeom>
-        </p:spPr>
-      </p:pic>
-      <p:sp>
-        <p:nvSpPr>
-          <p:cNvPr id="7" name="Trapezoid 6">
-            <a:extLst>
-              <a:ext uri="{FF2B5EF4-FFF2-40B4-BE49-F238E27FC236}">
-                <a16:creationId xmlns:a16="http://schemas.microsoft.com/office/drawing/2014/main" id="{139E3585-2076-D5F6-D46E-15BE2332FA36}"/>
-              </a:ext>
-            </a:extLst>
-          </p:cNvPr>
-          <p:cNvSpPr/>
-          <p:nvPr/>
-        </p:nvSpPr>
-        <p:spPr>
-          <a:xfrm rot="2700000">
-            <a:off x="9620371" y="514924"/>
-            <a:ext cx="3335198" cy="778213"/>
-          </a:xfrm>
-          <a:prstGeom prst="trapezoid">
-            <a:avLst>
-              <a:gd name="adj" fmla="val 100000"/>
-            </a:avLst>
-          </a:prstGeom>
-          <a:solidFill>
-            <a:srgbClr val="EDFAF2"/>
-          </a:solidFill>
-          <a:ln w="25400" cap="flat" cmpd="sng" algn="ctr">
-            <a:noFill/>
-            <a:prstDash val="solid"/>
-          </a:ln>
-          <a:effectLst/>
-          <a:extLst>
-            <a:ext uri="{91240B29-F687-4F45-9708-019B960494DF}">
-              <a14:hiddenLine xmlns:a14="http://schemas.microsoft.com/office/drawing/2010/main" w="25400" cap="flat" cmpd="sng" algn="ctr">
-                <a:solidFill>
-                  <a:schemeClr val="accent1">
-                    <a:shade val="15000"/>
-                  </a:schemeClr>
-                </a:solidFill>
-                <a:prstDash val="solid"/>
-              </a14:hiddenLine>
-            </a:ext>
-          </a:extLst>
-        </p:spPr>
-        <p:style>
-          <a:lnRef idx="2">
-            <a:schemeClr val="accent1">
-              <a:shade val="15000"/>
-            </a:schemeClr>
-          </a:lnRef>
-          <a:fillRef idx="1">
-            <a:schemeClr val="accent1"/>
-          </a:fillRef>
-          <a:effectRef idx="0">
-            <a:schemeClr val="accent1"/>
-          </a:effectRef>
-          <a:fontRef idx="minor">
-            <a:schemeClr val="lt1"/>
-          </a:fontRef>
-        </p:style>
-        <p:txBody>
-          <a:bodyPr tIns="0" bIns="0" rtlCol="0" anchor="t">
-            <a:normAutofit fontScale="70000" lnSpcReduction="20000"/>
-          </a:bodyPr>
-          <a:lstStyle/>
-          <a:p>
-            <a:pPr algn="ctr"/>
-            <a:r>
-              <a:rPr lang="en-US" sz="2600" b="1" dirty="0">
-                <a:solidFill>
-                  <a:srgbClr val="198038"/>
-                </a:solidFill>
-              </a:rPr>
-              <a:t>Do not edit
-</a:t>
-            </a:r>
-            <a:r>
-              <a:rPr lang="en-US" sz="2200" dirty="0">
-                <a:solidFill>
-                  <a:srgbClr val="198038"/>
-                </a:solidFill>
-                <a:hlinkClick r:id="rId11">
-                  <a:extLst>
-                    <a:ext uri="{A12FA001-AC4F-418D-AE19-62706E023703}">
-                      <ahyp:hlinkClr xmlns:ahyp="http://schemas.microsoft.com/office/drawing/2018/hyperlinkcolor" val="tx"/>
-                    </a:ext>
-                  </a:extLst>
-                </a:hlinkClick>
-              </a:rPr>
-              <a:t>How to change the design</a:t>
-            </a:r>
-            <a:endParaRPr lang="en-US" sz="2200" dirty="0">
-              <a:solidFill>
-                <a:srgbClr val="198038"/>
-              </a:solidFill>
-            </a:endParaRPr>
-          </a:p>
-        </p:txBody>
-      </p:sp>
-      <p:pic>
-        <p:nvPicPr>
-          <p:cNvPr id="9" name="Graphic 8">
-            <a:extLst>
-              <a:ext uri="{FF2B5EF4-FFF2-40B4-BE49-F238E27FC236}">
-                <a16:creationId xmlns:a16="http://schemas.microsoft.com/office/drawing/2014/main" id="{E43D7BBD-4F5A-B35D-283F-AE01D08F9261}"/>
-              </a:ext>
-            </a:extLst>
-          </p:cNvPr>
-          <p:cNvPicPr>
-            <a:picLocks/>
-          </p:cNvPicPr>
-          <p:nvPr/>
-        </p:nvPicPr>
-        <p:blipFill>
-          <a:blip r:embed="rId12">
-            <a:extLst>
-              <a:ext uri="{96DAC541-7B7A-43D3-8B79-37D633B846F1}">
-                <asvg:svgBlip xmlns:asvg="http://schemas.microsoft.com/office/drawing/2016/SVG/main" r:embed="rId13"/>
-              </a:ext>
-            </a:extLst>
-          </a:blip>
-          <a:stretch>
-            <a:fillRect/>
-          </a:stretch>
-        </p:blipFill>
-        <p:spPr>
-          <a:xfrm>
-            <a:off x="10746748" y="6153727"/>
-            <a:ext cx="1111733" cy="370578"/>
-          </a:xfrm>
-          <a:prstGeom prst="rect">
-            <a:avLst/>
-          </a:prstGeom>
-        </p:spPr>
-      </p:pic>
-    </p:spTree>
-    <p:custDataLst>
-      <p:tags r:id="rId1"/>
-    </p:custDataLst>
-    <p:extLst>
-      <p:ext uri="{BB962C8B-B14F-4D97-AF65-F5344CB8AC3E}">
-        <p14:creationId xmlns:p14="http://schemas.microsoft.com/office/powerpoint/2010/main" val="4202054108"/>
-      </p:ext>
-    </p:extLst>
-  </p:cSld>
-  <p:clrMapOvr>
-    <a:masterClrMapping/>
-  </p:clrMapOvr>
-  <p:timing>
-    <p:tnLst>
-      <p:par>
-        <p:cTn id="1" dur="indefinite" restart="never" nodeType="tmRoot">
-          <p:childTnLst>
-            <p:seq concurrent="1" nextAc="seek">
-              <p:cTn id="2" dur="indefinite" nodeType="mainSeq">
-                <p:childTnLst>
-                  <p:par>
-                    <p:cTn id="3" fill="hold">
-                      <p:stCondLst>
-                        <p:cond delay="indefinite"/>
-                      </p:stCondLst>
-                      <p:childTnLst>
-                        <p:par>
-                          <p:cTn id="4" fill="hold">
-                            <p:stCondLst>
-                              <p:cond delay="0"/>
-                            </p:stCondLst>
-                            <p:childTnLst>
-                              <p:par>
-                                <p:cTn id="5" presetID="26" presetClass="emph" presetSubtype="0" fill="hold" grpId="0" nodeType="clickEffect">
-                                  <p:stCondLst>
-                                    <p:cond delay="0"/>
-                                  </p:stCondLst>
-                                  <p:childTnLst>
-                                    <p:animEffect transition="out" filter="fade">
-                                      <p:cBhvr>
-                                        <p:cTn id="6" dur="50" tmFilter="0, 0; .2, .5; .8, .5; 1, 0"/>
-                                        <p:tgtEl>
-                                          <p:spTgt spid="3"/>
-                                        </p:tgtEl>
-                                      </p:cBhvr>
-                                    </p:animEffect>
-                                    <p:animScale>
-                                      <p:cBhvr>
-                                        <p:cTn id="7" dur="25" autoRev="1" fill="hold"/>
-                                        <p:tgtEl>
-                                          <p:spTgt spid="3"/>
-                                        </p:tgtEl>
-                                      </p:cBhvr>
-                                      <p:by x="105000" y="105000"/>
-                                    </p:animScale>
-                                  </p:childTnLst>
-                                </p:cTn>
-                              </p:par>
-                            </p:childTnLst>
-                          </p:cTn>
-                        </p:par>
-                      </p:childTnLst>
-                    </p:cTn>
-                  </p:par>
-                </p:childTnLst>
-              </p:cTn>
-              <p:prevCondLst>
-                <p:cond evt="onPrev" delay="0">
-                  <p:tgtEl>
-                    <p:sldTgt/>
-                  </p:tgtEl>
-                </p:cond>
-              </p:prevCondLst>
-              <p:nextCondLst>
-                <p:cond evt="onNext" delay="0">
-                  <p:tgtEl>
-                    <p:sldTgt/>
-                  </p:tgtEl>
-                </p:cond>
-              </p:nextCondLst>
-            </p:seq>
-          </p:childTnLst>
-        </p:cTn>
-      </p:par>
-    </p:tnLst>
-    <p:bldLst>
-      <p:bldP spid="3" grpId="0" animBg="1"/>
-    </p:bldLst>
-  </p:timing>
-</p:sld>
-</file>
-
-<file path=ppt/slides/slide40.xml><?xml version="1.0" encoding="utf-8"?>
+<file path=ppt/slides/slide41.xml><?xml version="1.0" encoding="utf-8"?>
 <p:sld xmlns:a="http://schemas.openxmlformats.org/drawingml/2006/main" xmlns:r="http://schemas.openxmlformats.org/officeDocument/2006/relationships" xmlns:p="http://schemas.openxmlformats.org/presentationml/2006/main">
   <p:cSld>
     <p:spTree>
@@ -35301,7 +35828,7 @@
 </p:sld>
 </file>
 
-<file path=ppt/slides/slide41.xml><?xml version="1.0" encoding="utf-8"?>
+<file path=ppt/slides/slide42.xml><?xml version="1.0" encoding="utf-8"?>
 <p:sld xmlns:a="http://schemas.openxmlformats.org/drawingml/2006/main" xmlns:r="http://schemas.openxmlformats.org/officeDocument/2006/relationships" xmlns:p="http://schemas.openxmlformats.org/presentationml/2006/main">
   <p:cSld>
     <p:spTree>
@@ -36440,7 +36967,7 @@
 </p:sld>
 </file>
 
-<file path=ppt/slides/slide42.xml><?xml version="1.0" encoding="utf-8"?>
+<file path=ppt/slides/slide43.xml><?xml version="1.0" encoding="utf-8"?>
 <p:sld xmlns:a="http://schemas.openxmlformats.org/drawingml/2006/main" xmlns:r="http://schemas.openxmlformats.org/officeDocument/2006/relationships" xmlns:p="http://schemas.openxmlformats.org/presentationml/2006/main">
   <p:cSld>
     <p:spTree>
@@ -37579,7 +38106,7 @@
 </p:sld>
 </file>
 
-<file path=ppt/slides/slide43.xml><?xml version="1.0" encoding="utf-8"?>
+<file path=ppt/slides/slide44.xml><?xml version="1.0" encoding="utf-8"?>
 <p:sld xmlns:a="http://schemas.openxmlformats.org/drawingml/2006/main" xmlns:r="http://schemas.openxmlformats.org/officeDocument/2006/relationships" xmlns:p="http://schemas.openxmlformats.org/presentationml/2006/main">
   <p:cSld>
     <p:spTree>
@@ -38992,7 +39519,7 @@
 </p:sld>
 </file>
 
-<file path=ppt/slides/slide44.xml><?xml version="1.0" encoding="utf-8"?>
+<file path=ppt/slides/slide45.xml><?xml version="1.0" encoding="utf-8"?>
 <p:sld xmlns:a="http://schemas.openxmlformats.org/drawingml/2006/main" xmlns:r="http://schemas.openxmlformats.org/officeDocument/2006/relationships" xmlns:p="http://schemas.openxmlformats.org/presentationml/2006/main">
   <p:cSld>
     <p:spTree>
@@ -39813,7 +40340,7 @@
 </p:sld>
 </file>
 
-<file path=ppt/slides/slide45.xml><?xml version="1.0" encoding="utf-8"?>
+<file path=ppt/slides/slide46.xml><?xml version="1.0" encoding="utf-8"?>
 <p:sld xmlns:a="http://schemas.openxmlformats.org/drawingml/2006/main" xmlns:r="http://schemas.openxmlformats.org/officeDocument/2006/relationships" xmlns:p="http://schemas.openxmlformats.org/presentationml/2006/main">
   <p:cSld>
     <p:spTree>
@@ -40043,7 +40570,7 @@
 </p:sld>
 </file>
 
-<file path=ppt/slides/slide46.xml><?xml version="1.0" encoding="utf-8"?>
+<file path=ppt/slides/slide47.xml><?xml version="1.0" encoding="utf-8"?>
 <p:sld xmlns:a="http://schemas.openxmlformats.org/drawingml/2006/main" xmlns:r="http://schemas.openxmlformats.org/officeDocument/2006/relationships" xmlns:p="http://schemas.openxmlformats.org/presentationml/2006/main">
   <p:cSld>
     <p:spTree>
@@ -40135,7 +40662,7 @@
 </p:sld>
 </file>
 
-<file path=ppt/slides/slide47.xml><?xml version="1.0" encoding="utf-8"?>
+<file path=ppt/slides/slide48.xml><?xml version="1.0" encoding="utf-8"?>
 <p:sld xmlns:a="http://schemas.openxmlformats.org/drawingml/2006/main" xmlns:r="http://schemas.openxmlformats.org/officeDocument/2006/relationships" xmlns:p="http://schemas.openxmlformats.org/presentationml/2006/main">
   <p:cSld>
     <p:spTree>
@@ -40244,7 +40771,7 @@
 </p:sld>
 </file>
 
-<file path=ppt/slides/slide48.xml><?xml version="1.0" encoding="utf-8"?>
+<file path=ppt/slides/slide49.xml><?xml version="1.0" encoding="utf-8"?>
 <p:sld xmlns:a="http://schemas.openxmlformats.org/drawingml/2006/main" xmlns:r="http://schemas.openxmlformats.org/officeDocument/2006/relationships" xmlns:p="http://schemas.openxmlformats.org/presentationml/2006/main">
   <p:cSld>
     <p:spTree>
@@ -40690,135 +41217,6 @@
     <p:extLst>
       <p:ext uri="{BB962C8B-B14F-4D97-AF65-F5344CB8AC3E}">
         <p14:creationId xmlns:p14="http://schemas.microsoft.com/office/powerpoint/2010/main" val="48677705"/>
-      </p:ext>
-    </p:extLst>
-  </p:cSld>
-  <p:clrMapOvr>
-    <a:masterClrMapping/>
-  </p:clrMapOvr>
-</p:sld>
-</file>
-
-<file path=ppt/slides/slide49.xml><?xml version="1.0" encoding="utf-8"?>
-<p:sld xmlns:a="http://schemas.openxmlformats.org/drawingml/2006/main" xmlns:r="http://schemas.openxmlformats.org/officeDocument/2006/relationships" xmlns:p="http://schemas.openxmlformats.org/presentationml/2006/main">
-  <p:cSld>
-    <p:spTree>
-      <p:nvGrpSpPr>
-        <p:cNvPr id="1" name=""/>
-        <p:cNvGrpSpPr/>
-        <p:nvPr/>
-      </p:nvGrpSpPr>
-      <p:grpSpPr>
-        <a:xfrm>
-          <a:off x="0" y="0"/>
-          <a:ext cx="0" cy="0"/>
-          <a:chOff x="0" y="0"/>
-          <a:chExt cx="0" cy="0"/>
-        </a:xfrm>
-      </p:grpSpPr>
-      <p:sp>
-        <p:nvSpPr>
-          <p:cNvPr id="2" name="Title 1">
-            <a:extLst>
-              <a:ext uri="{FF2B5EF4-FFF2-40B4-BE49-F238E27FC236}">
-                <a16:creationId xmlns:a16="http://schemas.microsoft.com/office/drawing/2014/main" id="{D1CB791A-E806-996D-C941-5FC104A1003B}"/>
-              </a:ext>
-            </a:extLst>
-          </p:cNvPr>
-          <p:cNvSpPr>
-            <a:spLocks noGrp="1"/>
-          </p:cNvSpPr>
-          <p:nvPr>
-            <p:ph type="title"/>
-          </p:nvPr>
-        </p:nvSpPr>
-        <p:spPr/>
-        <p:txBody>
-          <a:bodyPr/>
-          <a:lstStyle/>
-          <a:p>
-            <a:r>
-              <a:rPr lang="en-US" dirty="0"/>
-              <a:t>Spatial structure</a:t>
-            </a:r>
-          </a:p>
-        </p:txBody>
-      </p:sp>
-      <p:sp>
-        <p:nvSpPr>
-          <p:cNvPr id="3" name="Text Placeholder 2">
-            <a:extLst>
-              <a:ext uri="{FF2B5EF4-FFF2-40B4-BE49-F238E27FC236}">
-                <a16:creationId xmlns:a16="http://schemas.microsoft.com/office/drawing/2014/main" id="{B17D6D4B-2629-8C4E-C310-7CEF0D7468EB}"/>
-              </a:ext>
-            </a:extLst>
-          </p:cNvPr>
-          <p:cNvSpPr>
-            <a:spLocks noGrp="1"/>
-          </p:cNvSpPr>
-          <p:nvPr>
-            <p:ph type="body" idx="1"/>
-          </p:nvPr>
-        </p:nvSpPr>
-        <p:spPr/>
-        <p:txBody>
-          <a:bodyPr/>
-          <a:lstStyle/>
-          <a:p>
-            <a:r>
-              <a:rPr lang="en-US" dirty="0"/>
-              <a:t>Related to clustering and temporal structure</a:t>
-            </a:r>
-          </a:p>
-          <a:p>
-            <a:r>
-              <a:rPr lang="en-US" dirty="0"/>
-              <a:t>We often believe that nearby places are correlated</a:t>
-            </a:r>
-          </a:p>
-          <a:p>
-            <a:r>
-              <a:rPr lang="en-US" dirty="0"/>
-              <a:t>What do we care about in deployment? </a:t>
-            </a:r>
-          </a:p>
-          <a:p>
-            <a:pPr lvl="1"/>
-            <a:r>
-              <a:rPr lang="en-US" dirty="0"/>
-              <a:t>Generalization to new locations? </a:t>
-            </a:r>
-            <a:r>
-              <a:rPr lang="en-US" dirty="0">
-                <a:sym typeface="Wingdings" panose="05000000000000000000" pitchFamily="2" charset="2"/>
-              </a:rPr>
-              <a:t></a:t>
-            </a:r>
-            <a:r>
-              <a:rPr lang="en-US" dirty="0"/>
-              <a:t> Allocate large spatial blocks to train/test set</a:t>
-            </a:r>
-          </a:p>
-          <a:p>
-            <a:pPr lvl="1"/>
-            <a:r>
-              <a:rPr lang="en-US" dirty="0"/>
-              <a:t>Filling in between places seen during training </a:t>
-            </a:r>
-            <a:r>
-              <a:rPr lang="en-US" dirty="0">
-                <a:sym typeface="Wingdings" panose="05000000000000000000" pitchFamily="2" charset="2"/>
-              </a:rPr>
-              <a:t> Allocate smaller patches</a:t>
-            </a:r>
-            <a:endParaRPr lang="en-US" dirty="0"/>
-          </a:p>
-        </p:txBody>
-      </p:sp>
-    </p:spTree>
-    <p:extLst>
-      <p:ext uri="{BB962C8B-B14F-4D97-AF65-F5344CB8AC3E}">
-        <p14:creationId xmlns:p14="http://schemas.microsoft.com/office/powerpoint/2010/main" val="329160848"/>
       </p:ext>
     </p:extLst>
   </p:cSld>
@@ -40950,6 +41348,135 @@
     <p:extLst>
       <p:ext uri="{BB962C8B-B14F-4D97-AF65-F5344CB8AC3E}">
         <p14:creationId xmlns:p14="http://schemas.microsoft.com/office/powerpoint/2010/main" val="2336692870"/>
+      </p:ext>
+    </p:extLst>
+  </p:cSld>
+  <p:clrMapOvr>
+    <a:masterClrMapping/>
+  </p:clrMapOvr>
+</p:sld>
+</file>
+
+<file path=ppt/slides/slide50.xml><?xml version="1.0" encoding="utf-8"?>
+<p:sld xmlns:a="http://schemas.openxmlformats.org/drawingml/2006/main" xmlns:r="http://schemas.openxmlformats.org/officeDocument/2006/relationships" xmlns:p="http://schemas.openxmlformats.org/presentationml/2006/main">
+  <p:cSld>
+    <p:spTree>
+      <p:nvGrpSpPr>
+        <p:cNvPr id="1" name=""/>
+        <p:cNvGrpSpPr/>
+        <p:nvPr/>
+      </p:nvGrpSpPr>
+      <p:grpSpPr>
+        <a:xfrm>
+          <a:off x="0" y="0"/>
+          <a:ext cx="0" cy="0"/>
+          <a:chOff x="0" y="0"/>
+          <a:chExt cx="0" cy="0"/>
+        </a:xfrm>
+      </p:grpSpPr>
+      <p:sp>
+        <p:nvSpPr>
+          <p:cNvPr id="2" name="Title 1">
+            <a:extLst>
+              <a:ext uri="{FF2B5EF4-FFF2-40B4-BE49-F238E27FC236}">
+                <a16:creationId xmlns:a16="http://schemas.microsoft.com/office/drawing/2014/main" id="{D1CB791A-E806-996D-C941-5FC104A1003B}"/>
+              </a:ext>
+            </a:extLst>
+          </p:cNvPr>
+          <p:cNvSpPr>
+            <a:spLocks noGrp="1"/>
+          </p:cNvSpPr>
+          <p:nvPr>
+            <p:ph type="title"/>
+          </p:nvPr>
+        </p:nvSpPr>
+        <p:spPr/>
+        <p:txBody>
+          <a:bodyPr/>
+          <a:lstStyle/>
+          <a:p>
+            <a:r>
+              <a:rPr lang="en-US" dirty="0"/>
+              <a:t>Spatial structure</a:t>
+            </a:r>
+          </a:p>
+        </p:txBody>
+      </p:sp>
+      <p:sp>
+        <p:nvSpPr>
+          <p:cNvPr id="3" name="Text Placeholder 2">
+            <a:extLst>
+              <a:ext uri="{FF2B5EF4-FFF2-40B4-BE49-F238E27FC236}">
+                <a16:creationId xmlns:a16="http://schemas.microsoft.com/office/drawing/2014/main" id="{B17D6D4B-2629-8C4E-C310-7CEF0D7468EB}"/>
+              </a:ext>
+            </a:extLst>
+          </p:cNvPr>
+          <p:cNvSpPr>
+            <a:spLocks noGrp="1"/>
+          </p:cNvSpPr>
+          <p:nvPr>
+            <p:ph type="body" idx="1"/>
+          </p:nvPr>
+        </p:nvSpPr>
+        <p:spPr/>
+        <p:txBody>
+          <a:bodyPr/>
+          <a:lstStyle/>
+          <a:p>
+            <a:r>
+              <a:rPr lang="en-US" dirty="0"/>
+              <a:t>Related to clustering and temporal structure</a:t>
+            </a:r>
+          </a:p>
+          <a:p>
+            <a:r>
+              <a:rPr lang="en-US" dirty="0"/>
+              <a:t>We often believe that nearby places are correlated</a:t>
+            </a:r>
+          </a:p>
+          <a:p>
+            <a:r>
+              <a:rPr lang="en-US" dirty="0"/>
+              <a:t>What do we care about in deployment? </a:t>
+            </a:r>
+          </a:p>
+          <a:p>
+            <a:pPr lvl="1"/>
+            <a:r>
+              <a:rPr lang="en-US" dirty="0"/>
+              <a:t>Generalization to new locations? </a:t>
+            </a:r>
+            <a:r>
+              <a:rPr lang="en-US" dirty="0">
+                <a:sym typeface="Wingdings" panose="05000000000000000000" pitchFamily="2" charset="2"/>
+              </a:rPr>
+              <a:t></a:t>
+            </a:r>
+            <a:r>
+              <a:rPr lang="en-US" dirty="0"/>
+              <a:t> Allocate large spatial blocks to train/test set</a:t>
+            </a:r>
+          </a:p>
+          <a:p>
+            <a:pPr lvl="1"/>
+            <a:r>
+              <a:rPr lang="en-US" dirty="0"/>
+              <a:t>Filling in between places seen during training </a:t>
+            </a:r>
+            <a:r>
+              <a:rPr lang="en-US" dirty="0">
+                <a:sym typeface="Wingdings" panose="05000000000000000000" pitchFamily="2" charset="2"/>
+              </a:rPr>
+              <a:t> Allocate smaller patches</a:t>
+            </a:r>
+            <a:endParaRPr lang="en-US" dirty="0"/>
+          </a:p>
+        </p:txBody>
+      </p:sp>
+    </p:spTree>
+    <p:extLst>
+      <p:ext uri="{BB962C8B-B14F-4D97-AF65-F5344CB8AC3E}">
+        <p14:creationId xmlns:p14="http://schemas.microsoft.com/office/powerpoint/2010/main" val="329160848"/>
       </p:ext>
     </p:extLst>
   </p:cSld>
@@ -41442,6 +41969,27 @@
 </file>
 
 <file path=ppt/tags/tag4.xml><?xml version="1.0" encoding="utf-8"?>
+<p:tagLst xmlns:a="http://schemas.openxmlformats.org/drawingml/2006/main" xmlns:r="http://schemas.openxmlformats.org/officeDocument/2006/relationships" xmlns:p="http://schemas.openxmlformats.org/presentationml/2006/main">
+  <p:tag name="SLIDO_ELEMENT" val="title"/>
+</p:tagLst>
+</file>
+
+<file path=ppt/tags/tag5.xml><?xml version="1.0" encoding="utf-8"?>
+<p:tagLst xmlns:a="http://schemas.openxmlformats.org/drawingml/2006/main" xmlns:r="http://schemas.openxmlformats.org/officeDocument/2006/relationships" xmlns:p="http://schemas.openxmlformats.org/presentationml/2006/main">
+  <p:tag name="SLIDO_TYPE" val="SlidoPoll"/>
+  <p:tag name="SLIDO_POLL_UUID" val="7fdb6c13-66a1-4811-a773-de0bd8a0aa08"/>
+  <p:tag name="SLIDO_TIMELINE" val="W3sicG9sbFF1ZXN0aW9uVXVpZCI6ImI0YWJiMTI0LTk3MjMtNGExMy1iMDQ4LTlkNTIxYmMwMGM5NyIsInNob3dSZXN1bHRzIjpmYWxzZX0seyJwb2xsUXVlc3Rpb25VdWlkIjoiYjRhYmIxMjQtOTcyMy00YTEzLWIwNDgtOWQ1MjFiYzAwYzk3Iiwic2hvd1Jlc3VsdHMiOnRydWV9XQ=="/>
+</p:tagLst>
+</file>
+
+<file path=ppt/tags/tag6.xml><?xml version="1.0" encoding="utf-8"?>
+<p:tagLst xmlns:a="http://schemas.openxmlformats.org/drawingml/2006/main" xmlns:r="http://schemas.openxmlformats.org/officeDocument/2006/relationships" xmlns:p="http://schemas.openxmlformats.org/presentationml/2006/main">
+  <p:tag name="SLIDO_ELEMENT" val="interaction_image"/>
+  <p:tag name="INTERACTION_TYPE" val="MultipleChoice"/>
+</p:tagLst>
+</file>
+
+<file path=ppt/tags/tag7.xml><?xml version="1.0" encoding="utf-8"?>
 <p:tagLst xmlns:a="http://schemas.openxmlformats.org/drawingml/2006/main" xmlns:r="http://schemas.openxmlformats.org/officeDocument/2006/relationships" xmlns:p="http://schemas.openxmlformats.org/presentationml/2006/main">
   <p:tag name="SLIDO_ELEMENT" val="title"/>
 </p:tagLst>
